--- a/public/Modern Professional Business invoice Template.pptx
+++ b/public/Modern Professional Business invoice Template.pptx
@@ -3508,480 +3508,6 @@
           <a:chExt cx="0" cy="0"/>
         </a:xfrm>
       </p:grpSpPr>
-      <p:sp>
-        <p:nvSpPr>
-          <p:cNvPr id="2" name="Freeform 2"/>
-          <p:cNvSpPr>
-            <a:spLocks/>
-          </p:cNvSpPr>
-          <p:nvPr/>
-        </p:nvSpPr>
-        <p:spPr>
-          <a:xfrm>
-            <a:off x="1306830" y="10299700"/>
-            <a:ext cx="2422398" cy="600570"/>
-          </a:xfrm>
-          <a:prstGeom prst="rect">
-            <a:avLst/>
-          </a:prstGeom>
-          <a:blipFill>
-            <a:blip>
-              <a:extLst>
-                <a:ext uri="{96DAC541-7B7A-43D3-8B79-37D633B846F1}">
-                  <asvg:svgBlip xmlns:asvg="http://schemas.microsoft.com/office/drawing/2016/SVG/main" r:embed="rId3"/>
-                </a:ext>
-              </a:extLst>
-            </a:blip>
-            <a:stretch>
-              <a:fillRect/>
-            </a:stretch>
-          </a:blipFill>
-        </p:spPr>
-        <p:txBody>
-          <a:bodyPr/>
-          <a:lstStyle/>
-          <a:p>
-            <a:endParaRPr lang="en-US"/>
-          </a:p>
-        </p:txBody>
-      </p:sp>
-      <p:sp>
-        <p:nvSpPr>
-          <p:cNvPr id="3" name="Freeform 3"/>
-          <p:cNvSpPr>
-            <a:spLocks/>
-          </p:cNvSpPr>
-          <p:nvPr/>
-        </p:nvSpPr>
-        <p:spPr>
-          <a:xfrm>
-            <a:off x="603228" y="10299700"/>
-            <a:ext cx="2422398" cy="600570"/>
-          </a:xfrm>
-          <a:prstGeom prst="rect">
-            <a:avLst/>
-          </a:prstGeom>
-          <a:blipFill>
-            <a:blip>
-              <a:extLst>
-                <a:ext uri="{96DAC541-7B7A-43D3-8B79-37D633B846F1}">
-                  <asvg:svgBlip xmlns:asvg="http://schemas.microsoft.com/office/drawing/2016/SVG/main" r:embed="rId4"/>
-                </a:ext>
-              </a:extLst>
-            </a:blip>
-            <a:stretch>
-              <a:fillRect/>
-            </a:stretch>
-          </a:blipFill>
-        </p:spPr>
-        <p:txBody>
-          <a:bodyPr/>
-          <a:lstStyle/>
-          <a:p>
-            <a:endParaRPr lang="en-US"/>
-          </a:p>
-        </p:txBody>
-      </p:sp>
-      <p:sp>
-        <p:nvSpPr>
-          <p:cNvPr id="4" name="Freeform 4"/>
-          <p:cNvSpPr>
-            <a:spLocks/>
-          </p:cNvSpPr>
-          <p:nvPr/>
-        </p:nvSpPr>
-        <p:spPr>
-          <a:xfrm>
-            <a:off x="0" y="10299700"/>
-            <a:ext cx="2318642" cy="600570"/>
-          </a:xfrm>
-          <a:prstGeom prst="rect">
-            <a:avLst/>
-          </a:prstGeom>
-          <a:blipFill>
-            <a:blip>
-              <a:extLst>
-                <a:ext uri="{96DAC541-7B7A-43D3-8B79-37D633B846F1}">
-                  <asvg:svgBlip xmlns:asvg="http://schemas.microsoft.com/office/drawing/2016/SVG/main" r:embed="rId5"/>
-                </a:ext>
-              </a:extLst>
-            </a:blip>
-            <a:stretch>
-              <a:fillRect/>
-            </a:stretch>
-          </a:blipFill>
-        </p:spPr>
-        <p:txBody>
-          <a:bodyPr/>
-          <a:lstStyle/>
-          <a:p>
-            <a:endParaRPr lang="en-US"/>
-          </a:p>
-        </p:txBody>
-      </p:sp>
-      <p:grpSp>
-        <p:nvGrpSpPr>
-          <p:cNvPr id="8" name="Group 8"/>
-          <p:cNvGrpSpPr/>
-          <p:nvPr/>
-        </p:nvGrpSpPr>
-        <p:grpSpPr>
-          <a:xfrm>
-            <a:off x="1759048" y="9483657"/>
-            <a:ext cx="231448" cy="231448"/>
-            <a:chOff x="0" y="0"/>
-            <a:chExt cx="1913890" cy="1913890"/>
-          </a:xfrm>
-        </p:grpSpPr>
-        <p:sp>
-          <p:nvSpPr>
-            <p:cNvPr id="9" name="Freeform 9"/>
-            <p:cNvSpPr/>
-            <p:nvPr/>
-          </p:nvSpPr>
-          <p:spPr>
-            <a:xfrm>
-              <a:off x="0" y="0"/>
-              <a:ext cx="1913890" cy="1913890"/>
-            </a:xfrm>
-            <a:custGeom>
-              <a:avLst/>
-              <a:gdLst/>
-              <a:ahLst/>
-              <a:cxnLst/>
-              <a:rect l="l" t="t" r="r" b="b"/>
-              <a:pathLst>
-                <a:path w="1913890" h="1913890">
-                  <a:moveTo>
-                    <a:pt x="0" y="0"/>
-                  </a:moveTo>
-                  <a:lnTo>
-                    <a:pt x="1913890" y="0"/>
-                  </a:lnTo>
-                  <a:lnTo>
-                    <a:pt x="1913890" y="1913890"/>
-                  </a:lnTo>
-                  <a:lnTo>
-                    <a:pt x="0" y="1913890"/>
-                  </a:lnTo>
-                  <a:close/>
-                </a:path>
-              </a:pathLst>
-            </a:custGeom>
-            <a:solidFill>
-              <a:srgbClr val="21A8C9"/>
-            </a:solidFill>
-          </p:spPr>
-          <p:txBody>
-            <a:bodyPr/>
-            <a:lstStyle/>
-            <a:p>
-              <a:endParaRPr lang="en-US"/>
-            </a:p>
-          </p:txBody>
-        </p:sp>
-      </p:grpSp>
-      <p:sp>
-        <p:nvSpPr>
-          <p:cNvPr id="10" name="Freeform 10"/>
-          <p:cNvSpPr/>
-          <p:nvPr/>
-        </p:nvSpPr>
-        <p:spPr>
-          <a:xfrm>
-            <a:off x="1809292" y="9542764"/>
-            <a:ext cx="130959" cy="113233"/>
-          </a:xfrm>
-          <a:custGeom>
-            <a:avLst/>
-            <a:gdLst/>
-            <a:ahLst/>
-            <a:cxnLst/>
-            <a:rect l="l" t="t" r="r" b="b"/>
-            <a:pathLst>
-              <a:path w="130959" h="113233">
-                <a:moveTo>
-                  <a:pt x="0" y="0"/>
-                </a:moveTo>
-                <a:lnTo>
-                  <a:pt x="130960" y="0"/>
-                </a:lnTo>
-                <a:lnTo>
-                  <a:pt x="130960" y="113233"/>
-                </a:lnTo>
-                <a:lnTo>
-                  <a:pt x="0" y="113233"/>
-                </a:lnTo>
-                <a:lnTo>
-                  <a:pt x="0" y="0"/>
-                </a:lnTo>
-                <a:close/>
-              </a:path>
-            </a:pathLst>
-          </a:custGeom>
-          <a:blipFill>
-            <a:blip>
-              <a:extLst>
-                <a:ext uri="{96DAC541-7B7A-43D3-8B79-37D633B846F1}">
-                  <asvg:svgBlip xmlns:asvg="http://schemas.microsoft.com/office/drawing/2016/SVG/main" r:embed="rId6"/>
-                </a:ext>
-              </a:extLst>
-            </a:blip>
-            <a:stretch>
-              <a:fillRect/>
-            </a:stretch>
-          </a:blipFill>
-        </p:spPr>
-        <p:txBody>
-          <a:bodyPr/>
-          <a:lstStyle/>
-          <a:p>
-            <a:endParaRPr lang="en-US"/>
-          </a:p>
-        </p:txBody>
-      </p:sp>
-      <p:grpSp>
-        <p:nvGrpSpPr>
-          <p:cNvPr id="11" name="Group 11"/>
-          <p:cNvGrpSpPr/>
-          <p:nvPr/>
-        </p:nvGrpSpPr>
-        <p:grpSpPr>
-          <a:xfrm>
-            <a:off x="3090470" y="9483657"/>
-            <a:ext cx="231448" cy="231448"/>
-            <a:chOff x="0" y="0"/>
-            <a:chExt cx="1913890" cy="1913890"/>
-          </a:xfrm>
-        </p:grpSpPr>
-        <p:sp>
-          <p:nvSpPr>
-            <p:cNvPr id="12" name="Freeform 12"/>
-            <p:cNvSpPr/>
-            <p:nvPr/>
-          </p:nvSpPr>
-          <p:spPr>
-            <a:xfrm>
-              <a:off x="0" y="0"/>
-              <a:ext cx="1913890" cy="1913890"/>
-            </a:xfrm>
-            <a:custGeom>
-              <a:avLst/>
-              <a:gdLst/>
-              <a:ahLst/>
-              <a:cxnLst/>
-              <a:rect l="l" t="t" r="r" b="b"/>
-              <a:pathLst>
-                <a:path w="1913890" h="1913890">
-                  <a:moveTo>
-                    <a:pt x="0" y="0"/>
-                  </a:moveTo>
-                  <a:lnTo>
-                    <a:pt x="1913890" y="0"/>
-                  </a:lnTo>
-                  <a:lnTo>
-                    <a:pt x="1913890" y="1913890"/>
-                  </a:lnTo>
-                  <a:lnTo>
-                    <a:pt x="0" y="1913890"/>
-                  </a:lnTo>
-                  <a:close/>
-                </a:path>
-              </a:pathLst>
-            </a:custGeom>
-            <a:solidFill>
-              <a:srgbClr val="21A8C9"/>
-            </a:solidFill>
-          </p:spPr>
-          <p:txBody>
-            <a:bodyPr/>
-            <a:lstStyle/>
-            <a:p>
-              <a:endParaRPr lang="en-US"/>
-            </a:p>
-          </p:txBody>
-        </p:sp>
-      </p:grpSp>
-      <p:sp>
-        <p:nvSpPr>
-          <p:cNvPr id="13" name="Freeform 13"/>
-          <p:cNvSpPr/>
-          <p:nvPr/>
-        </p:nvSpPr>
-        <p:spPr>
-          <a:xfrm>
-            <a:off x="3145311" y="9536654"/>
-            <a:ext cx="121768" cy="125454"/>
-          </a:xfrm>
-          <a:custGeom>
-            <a:avLst/>
-            <a:gdLst/>
-            <a:ahLst/>
-            <a:cxnLst/>
-            <a:rect l="l" t="t" r="r" b="b"/>
-            <a:pathLst>
-              <a:path w="121768" h="125454">
-                <a:moveTo>
-                  <a:pt x="0" y="0"/>
-                </a:moveTo>
-                <a:lnTo>
-                  <a:pt x="121767" y="0"/>
-                </a:lnTo>
-                <a:lnTo>
-                  <a:pt x="121767" y="125453"/>
-                </a:lnTo>
-                <a:lnTo>
-                  <a:pt x="0" y="125453"/>
-                </a:lnTo>
-                <a:lnTo>
-                  <a:pt x="0" y="0"/>
-                </a:lnTo>
-                <a:close/>
-              </a:path>
-            </a:pathLst>
-          </a:custGeom>
-          <a:blipFill>
-            <a:blip>
-              <a:extLst>
-                <a:ext uri="{96DAC541-7B7A-43D3-8B79-37D633B846F1}">
-                  <asvg:svgBlip xmlns:asvg="http://schemas.microsoft.com/office/drawing/2016/SVG/main" r:embed="rId7"/>
-                </a:ext>
-              </a:extLst>
-            </a:blip>
-            <a:stretch>
-              <a:fillRect/>
-            </a:stretch>
-          </a:blipFill>
-        </p:spPr>
-        <p:txBody>
-          <a:bodyPr/>
-          <a:lstStyle/>
-          <a:p>
-            <a:endParaRPr lang="en-US"/>
-          </a:p>
-        </p:txBody>
-      </p:sp>
-      <p:grpSp>
-        <p:nvGrpSpPr>
-          <p:cNvPr id="14" name="Group 14"/>
-          <p:cNvGrpSpPr/>
-          <p:nvPr/>
-        </p:nvGrpSpPr>
-        <p:grpSpPr>
-          <a:xfrm>
-            <a:off x="4649749" y="9483657"/>
-            <a:ext cx="231448" cy="231448"/>
-            <a:chOff x="0" y="0"/>
-            <a:chExt cx="1913890" cy="1913890"/>
-          </a:xfrm>
-        </p:grpSpPr>
-        <p:sp>
-          <p:nvSpPr>
-            <p:cNvPr id="15" name="Freeform 15"/>
-            <p:cNvSpPr/>
-            <p:nvPr/>
-          </p:nvSpPr>
-          <p:spPr>
-            <a:xfrm>
-              <a:off x="0" y="0"/>
-              <a:ext cx="1913890" cy="1913890"/>
-            </a:xfrm>
-            <a:custGeom>
-              <a:avLst/>
-              <a:gdLst/>
-              <a:ahLst/>
-              <a:cxnLst/>
-              <a:rect l="l" t="t" r="r" b="b"/>
-              <a:pathLst>
-                <a:path w="1913890" h="1913890">
-                  <a:moveTo>
-                    <a:pt x="0" y="0"/>
-                  </a:moveTo>
-                  <a:lnTo>
-                    <a:pt x="1913890" y="0"/>
-                  </a:lnTo>
-                  <a:lnTo>
-                    <a:pt x="1913890" y="1913890"/>
-                  </a:lnTo>
-                  <a:lnTo>
-                    <a:pt x="0" y="1913890"/>
-                  </a:lnTo>
-                  <a:close/>
-                </a:path>
-              </a:pathLst>
-            </a:custGeom>
-            <a:solidFill>
-              <a:srgbClr val="21A8C9"/>
-            </a:solidFill>
-          </p:spPr>
-          <p:txBody>
-            <a:bodyPr/>
-            <a:lstStyle/>
-            <a:p>
-              <a:endParaRPr lang="en-US"/>
-            </a:p>
-          </p:txBody>
-        </p:sp>
-      </p:grpSp>
-      <p:sp>
-        <p:nvSpPr>
-          <p:cNvPr id="16" name="Freeform 16"/>
-          <p:cNvSpPr/>
-          <p:nvPr/>
-        </p:nvSpPr>
-        <p:spPr>
-          <a:xfrm>
-            <a:off x="4719615" y="9529529"/>
-            <a:ext cx="91716" cy="139703"/>
-          </a:xfrm>
-          <a:custGeom>
-            <a:avLst/>
-            <a:gdLst/>
-            <a:ahLst/>
-            <a:cxnLst/>
-            <a:rect l="l" t="t" r="r" b="b"/>
-            <a:pathLst>
-              <a:path w="91716" h="139703">
-                <a:moveTo>
-                  <a:pt x="0" y="0"/>
-                </a:moveTo>
-                <a:lnTo>
-                  <a:pt x="91716" y="0"/>
-                </a:lnTo>
-                <a:lnTo>
-                  <a:pt x="91716" y="139703"/>
-                </a:lnTo>
-                <a:lnTo>
-                  <a:pt x="0" y="139703"/>
-                </a:lnTo>
-                <a:lnTo>
-                  <a:pt x="0" y="0"/>
-                </a:lnTo>
-                <a:close/>
-              </a:path>
-            </a:pathLst>
-          </a:custGeom>
-          <a:blipFill>
-            <a:blip>
-              <a:extLst>
-                <a:ext uri="{96DAC541-7B7A-43D3-8B79-37D633B846F1}">
-                  <asvg:svgBlip xmlns:asvg="http://schemas.microsoft.com/office/drawing/2016/SVG/main" r:embed="rId8"/>
-                </a:ext>
-              </a:extLst>
-            </a:blip>
-            <a:stretch>
-              <a:fillRect/>
-            </a:stretch>
-          </a:blipFill>
-        </p:spPr>
-        <p:txBody>
-          <a:bodyPr/>
-          <a:lstStyle/>
-          <a:p>
-            <a:endParaRPr lang="en-US"/>
-          </a:p>
-        </p:txBody>
-      </p:sp>
       <p:grpSp>
         <p:nvGrpSpPr>
           <p:cNvPr id="17" name="Group 17"/>
@@ -4275,7 +3801,7 @@
             </a:pathLst>
           </a:custGeom>
           <a:blipFill>
-            <a:blip r:embed="rId9"/>
+            <a:blip r:embed="rId3"/>
             <a:stretch>
               <a:fillRect/>
             </a:stretch>
@@ -4286,129 +3812,6 @@
           <a:lstStyle/>
           <a:p>
             <a:endParaRPr lang="en-US"/>
-          </a:p>
-        </p:txBody>
-      </p:sp>
-      <p:sp>
-        <p:nvSpPr>
-          <p:cNvPr id="30" name="TextBox 30"/>
-          <p:cNvSpPr txBox="1"/>
-          <p:nvPr/>
-        </p:nvSpPr>
-        <p:spPr>
-          <a:xfrm>
-            <a:off x="2038881" y="9533239"/>
-            <a:ext cx="820380" cy="115613"/>
-          </a:xfrm>
-          <a:prstGeom prst="rect">
-            <a:avLst/>
-          </a:prstGeom>
-        </p:spPr>
-        <p:txBody>
-          <a:bodyPr lIns="0" tIns="0" rIns="0" bIns="0" rtlCol="0" anchor="t">
-            <a:spAutoFit/>
-          </a:bodyPr>
-          <a:lstStyle/>
-          <a:p>
-            <a:pPr algn="l">
-              <a:lnSpc>
-                <a:spcPts val="938"/>
-              </a:lnSpc>
-            </a:pPr>
-            <a:r>
-              <a:rPr lang="en-US" sz="700" spc="11">
-                <a:solidFill>
-                  <a:srgbClr val="303642"/>
-                </a:solidFill>
-                <a:latin typeface="Open Sans"/>
-                <a:ea typeface="Open Sans"/>
-                <a:cs typeface="Open Sans"/>
-                <a:sym typeface="Open Sans"/>
-              </a:rPr>
-              <a:t>+94 74 257 0943</a:t>
-            </a:r>
-          </a:p>
-        </p:txBody>
-      </p:sp>
-      <p:sp>
-        <p:nvSpPr>
-          <p:cNvPr id="31" name="TextBox 31"/>
-          <p:cNvSpPr txBox="1"/>
-          <p:nvPr/>
-        </p:nvSpPr>
-        <p:spPr>
-          <a:xfrm>
-            <a:off x="4956851" y="9461500"/>
-            <a:ext cx="1196973" cy="266235"/>
-          </a:xfrm>
-          <a:prstGeom prst="rect">
-            <a:avLst/>
-          </a:prstGeom>
-        </p:spPr>
-        <p:txBody>
-          <a:bodyPr lIns="0" tIns="0" rIns="0" bIns="0" rtlCol="0" anchor="t">
-            <a:spAutoFit/>
-          </a:bodyPr>
-          <a:lstStyle/>
-          <a:p>
-            <a:pPr algn="l">
-              <a:lnSpc>
-                <a:spcPts val="1072"/>
-              </a:lnSpc>
-            </a:pPr>
-            <a:r>
-              <a:rPr lang="en-US" sz="800" spc="12">
-                <a:solidFill>
-                  <a:srgbClr val="303642"/>
-                </a:solidFill>
-                <a:latin typeface="Open Sans"/>
-                <a:ea typeface="Open Sans"/>
-                <a:cs typeface="Open Sans"/>
-                <a:sym typeface="Open Sans"/>
-              </a:rPr>
-              <a:t>Dewalegma, Dellawa, Morawaka</a:t>
-            </a:r>
-          </a:p>
-        </p:txBody>
-      </p:sp>
-      <p:sp>
-        <p:nvSpPr>
-          <p:cNvPr id="32" name="TextBox 32"/>
-          <p:cNvSpPr txBox="1"/>
-          <p:nvPr/>
-        </p:nvSpPr>
-        <p:spPr>
-          <a:xfrm>
-            <a:off x="3388477" y="9520004"/>
-            <a:ext cx="1304173" cy="130768"/>
-          </a:xfrm>
-          <a:prstGeom prst="rect">
-            <a:avLst/>
-          </a:prstGeom>
-        </p:spPr>
-        <p:txBody>
-          <a:bodyPr lIns="0" tIns="0" rIns="0" bIns="0" rtlCol="0" anchor="t">
-            <a:spAutoFit/>
-          </a:bodyPr>
-          <a:lstStyle/>
-          <a:p>
-            <a:pPr algn="l">
-              <a:lnSpc>
-                <a:spcPts val="1072"/>
-              </a:lnSpc>
-            </a:pPr>
-            <a:r>
-              <a:rPr lang="en-US" sz="800" spc="12">
-                <a:solidFill>
-                  <a:srgbClr val="303642"/>
-                </a:solidFill>
-                <a:latin typeface="Open Sans"/>
-                <a:ea typeface="Open Sans"/>
-                <a:cs typeface="Open Sans"/>
-                <a:sym typeface="Open Sans"/>
-              </a:rPr>
-              <a:t>www.itechlk.com</a:t>
-            </a:r>
           </a:p>
         </p:txBody>
       </p:sp>
@@ -5095,7 +4498,7 @@
         <p:spPr>
           <a:xfrm>
             <a:off x="6088035" y="3288826"/>
-            <a:ext cx="421434" cy="156845"/>
+            <a:ext cx="731520" cy="156845"/>
           </a:xfrm>
           <a:prstGeom prst="rect">
             <a:avLst/>
@@ -5382,7 +4785,7 @@
         <p:spPr>
           <a:xfrm>
             <a:off x="755909" y="2180387"/>
-            <a:ext cx="1581519" cy="654923"/>
+            <a:ext cx="2286000" cy="654923"/>
           </a:xfrm>
           <a:prstGeom prst="rect">
             <a:avLst/>
@@ -5480,7 +4883,7 @@
         <p:spPr>
           <a:xfrm>
             <a:off x="755909" y="1887322"/>
-            <a:ext cx="2065431" cy="216149"/>
+            <a:ext cx="2926080" cy="216149"/>
           </a:xfrm>
           <a:prstGeom prst="rect">
             <a:avLst/>
@@ -6572,6 +5975,582 @@
           </a:p>
         </p:txBody>
       </p:sp>
+      <p:pic>
+        <p:nvPicPr>
+          <p:cNvPr id="23" name="Picture 22">
+            <a:extLst>
+              <a:ext uri="{FF2B5EF4-FFF2-40B4-BE49-F238E27FC236}">
+                <a16:creationId xmlns:a16="http://schemas.microsoft.com/office/drawing/2014/main" id="{BBBD8407-EC83-A82E-DB45-312966CBCD9A}"/>
+              </a:ext>
+            </a:extLst>
+          </p:cNvPr>
+          <p:cNvPicPr>
+            <a:picLocks noChangeAspect="1"/>
+          </p:cNvPicPr>
+          <p:nvPr/>
+        </p:nvPicPr>
+        <p:blipFill>
+          <a:blip r:embed="rId4" cstate="print">
+            <a:extLst>
+              <a:ext uri="{28A0092B-C50C-407E-A947-70E740481C1C}">
+                <a14:useLocalDpi xmlns:a14="http://schemas.microsoft.com/office/drawing/2010/main" val="0"/>
+              </a:ext>
+            </a:extLst>
+          </a:blip>
+          <a:stretch>
+            <a:fillRect/>
+          </a:stretch>
+        </p:blipFill>
+        <p:spPr>
+          <a:xfrm>
+            <a:off x="1339850" y="10297242"/>
+            <a:ext cx="2421798" cy="601293"/>
+          </a:xfrm>
+          <a:prstGeom prst="rect">
+            <a:avLst/>
+          </a:prstGeom>
+        </p:spPr>
+      </p:pic>
+      <p:pic>
+        <p:nvPicPr>
+          <p:cNvPr id="24" name="Picture 23">
+            <a:extLst>
+              <a:ext uri="{FF2B5EF4-FFF2-40B4-BE49-F238E27FC236}">
+                <a16:creationId xmlns:a16="http://schemas.microsoft.com/office/drawing/2014/main" id="{47940F11-F526-D99A-33CE-2B95AEDD652B}"/>
+              </a:ext>
+            </a:extLst>
+          </p:cNvPr>
+          <p:cNvPicPr>
+            <a:picLocks noChangeAspect="1"/>
+          </p:cNvPicPr>
+          <p:nvPr/>
+        </p:nvPicPr>
+        <p:blipFill>
+          <a:blip r:embed="rId5" cstate="print">
+            <a:extLst>
+              <a:ext uri="{28A0092B-C50C-407E-A947-70E740481C1C}">
+                <a14:useLocalDpi xmlns:a14="http://schemas.microsoft.com/office/drawing/2010/main" val="0"/>
+              </a:ext>
+            </a:extLst>
+          </a:blip>
+          <a:stretch>
+            <a:fillRect/>
+          </a:stretch>
+        </p:blipFill>
+        <p:spPr>
+          <a:xfrm>
+            <a:off x="598393" y="10297242"/>
+            <a:ext cx="2421798" cy="601293"/>
+          </a:xfrm>
+          <a:prstGeom prst="rect">
+            <a:avLst/>
+          </a:prstGeom>
+        </p:spPr>
+      </p:pic>
+      <p:pic>
+        <p:nvPicPr>
+          <p:cNvPr id="25" name="Picture 24">
+            <a:extLst>
+              <a:ext uri="{FF2B5EF4-FFF2-40B4-BE49-F238E27FC236}">
+                <a16:creationId xmlns:a16="http://schemas.microsoft.com/office/drawing/2014/main" id="{9A956BF2-8E7B-6057-3B02-6182AD410523}"/>
+              </a:ext>
+            </a:extLst>
+          </p:cNvPr>
+          <p:cNvPicPr>
+            <a:picLocks noChangeAspect="1"/>
+          </p:cNvPicPr>
+          <p:nvPr/>
+        </p:nvPicPr>
+        <p:blipFill>
+          <a:blip r:embed="rId6" cstate="print">
+            <a:extLst>
+              <a:ext uri="{28A0092B-C50C-407E-A947-70E740481C1C}">
+                <a14:useLocalDpi xmlns:a14="http://schemas.microsoft.com/office/drawing/2010/main" val="0"/>
+              </a:ext>
+            </a:extLst>
+          </a:blip>
+          <a:stretch>
+            <a:fillRect/>
+          </a:stretch>
+        </p:blipFill>
+        <p:spPr>
+          <a:xfrm>
+            <a:off x="-5176" y="10297242"/>
+            <a:ext cx="2319273" cy="601293"/>
+          </a:xfrm>
+          <a:prstGeom prst="rect">
+            <a:avLst/>
+          </a:prstGeom>
+        </p:spPr>
+      </p:pic>
+      <p:grpSp>
+        <p:nvGrpSpPr>
+          <p:cNvPr id="26" name="Group 8">
+            <a:extLst>
+              <a:ext uri="{FF2B5EF4-FFF2-40B4-BE49-F238E27FC236}">
+                <a16:creationId xmlns:a16="http://schemas.microsoft.com/office/drawing/2014/main" id="{F5889E09-E698-90D2-20AA-CBEA5AB76923}"/>
+              </a:ext>
+            </a:extLst>
+          </p:cNvPr>
+          <p:cNvGrpSpPr/>
+          <p:nvPr/>
+        </p:nvGrpSpPr>
+        <p:grpSpPr>
+          <a:xfrm>
+            <a:off x="1759048" y="9483657"/>
+            <a:ext cx="231448" cy="231448"/>
+            <a:chOff x="0" y="0"/>
+            <a:chExt cx="1913890" cy="1913890"/>
+          </a:xfrm>
+        </p:grpSpPr>
+        <p:sp>
+          <p:nvSpPr>
+            <p:cNvPr id="38" name="Freeform 9">
+              <a:extLst>
+                <a:ext uri="{FF2B5EF4-FFF2-40B4-BE49-F238E27FC236}">
+                  <a16:creationId xmlns:a16="http://schemas.microsoft.com/office/drawing/2014/main" id="{BF4F2020-F32E-7F9C-FCBF-413C7216CF4F}"/>
+                </a:ext>
+              </a:extLst>
+            </p:cNvPr>
+            <p:cNvSpPr/>
+            <p:nvPr/>
+          </p:nvSpPr>
+          <p:spPr>
+            <a:xfrm>
+              <a:off x="0" y="0"/>
+              <a:ext cx="1913890" cy="1913890"/>
+            </a:xfrm>
+            <a:custGeom>
+              <a:avLst/>
+              <a:gdLst/>
+              <a:ahLst/>
+              <a:cxnLst/>
+              <a:rect l="l" t="t" r="r" b="b"/>
+              <a:pathLst>
+                <a:path w="1913890" h="1913890">
+                  <a:moveTo>
+                    <a:pt x="0" y="0"/>
+                  </a:moveTo>
+                  <a:lnTo>
+                    <a:pt x="1913890" y="0"/>
+                  </a:lnTo>
+                  <a:lnTo>
+                    <a:pt x="1913890" y="1913890"/>
+                  </a:lnTo>
+                  <a:lnTo>
+                    <a:pt x="0" y="1913890"/>
+                  </a:lnTo>
+                  <a:close/>
+                </a:path>
+              </a:pathLst>
+            </a:custGeom>
+            <a:solidFill>
+              <a:srgbClr val="21A8C9"/>
+            </a:solidFill>
+          </p:spPr>
+          <p:txBody>
+            <a:bodyPr/>
+            <a:lstStyle/>
+            <a:p>
+              <a:endParaRPr lang="en-US"/>
+            </a:p>
+          </p:txBody>
+        </p:sp>
+      </p:grpSp>
+      <p:grpSp>
+        <p:nvGrpSpPr>
+          <p:cNvPr id="39" name="Group 11">
+            <a:extLst>
+              <a:ext uri="{FF2B5EF4-FFF2-40B4-BE49-F238E27FC236}">
+                <a16:creationId xmlns:a16="http://schemas.microsoft.com/office/drawing/2014/main" id="{F4184376-67BF-B82B-D83C-EA3E41503439}"/>
+              </a:ext>
+            </a:extLst>
+          </p:cNvPr>
+          <p:cNvGrpSpPr/>
+          <p:nvPr/>
+        </p:nvGrpSpPr>
+        <p:grpSpPr>
+          <a:xfrm>
+            <a:off x="3090470" y="9483657"/>
+            <a:ext cx="231448" cy="231448"/>
+            <a:chOff x="0" y="0"/>
+            <a:chExt cx="1913890" cy="1913890"/>
+          </a:xfrm>
+        </p:grpSpPr>
+        <p:sp>
+          <p:nvSpPr>
+            <p:cNvPr id="40" name="Freeform 12">
+              <a:extLst>
+                <a:ext uri="{FF2B5EF4-FFF2-40B4-BE49-F238E27FC236}">
+                  <a16:creationId xmlns:a16="http://schemas.microsoft.com/office/drawing/2014/main" id="{4E99C186-27B1-1A90-FE14-9E1FE2BF12F0}"/>
+                </a:ext>
+              </a:extLst>
+            </p:cNvPr>
+            <p:cNvSpPr/>
+            <p:nvPr/>
+          </p:nvSpPr>
+          <p:spPr>
+            <a:xfrm>
+              <a:off x="0" y="0"/>
+              <a:ext cx="1913890" cy="1913890"/>
+            </a:xfrm>
+            <a:custGeom>
+              <a:avLst/>
+              <a:gdLst/>
+              <a:ahLst/>
+              <a:cxnLst/>
+              <a:rect l="l" t="t" r="r" b="b"/>
+              <a:pathLst>
+                <a:path w="1913890" h="1913890">
+                  <a:moveTo>
+                    <a:pt x="0" y="0"/>
+                  </a:moveTo>
+                  <a:lnTo>
+                    <a:pt x="1913890" y="0"/>
+                  </a:lnTo>
+                  <a:lnTo>
+                    <a:pt x="1913890" y="1913890"/>
+                  </a:lnTo>
+                  <a:lnTo>
+                    <a:pt x="0" y="1913890"/>
+                  </a:lnTo>
+                  <a:close/>
+                </a:path>
+              </a:pathLst>
+            </a:custGeom>
+            <a:solidFill>
+              <a:srgbClr val="21A8C9"/>
+            </a:solidFill>
+          </p:spPr>
+          <p:txBody>
+            <a:bodyPr/>
+            <a:lstStyle/>
+            <a:p>
+              <a:endParaRPr lang="en-US"/>
+            </a:p>
+          </p:txBody>
+        </p:sp>
+      </p:grpSp>
+      <p:grpSp>
+        <p:nvGrpSpPr>
+          <p:cNvPr id="41" name="Group 14">
+            <a:extLst>
+              <a:ext uri="{FF2B5EF4-FFF2-40B4-BE49-F238E27FC236}">
+                <a16:creationId xmlns:a16="http://schemas.microsoft.com/office/drawing/2014/main" id="{E43C5B8F-30F5-8A8A-1A22-5820C8E06D3A}"/>
+              </a:ext>
+            </a:extLst>
+          </p:cNvPr>
+          <p:cNvGrpSpPr/>
+          <p:nvPr/>
+        </p:nvGrpSpPr>
+        <p:grpSpPr>
+          <a:xfrm>
+            <a:off x="4649749" y="9483657"/>
+            <a:ext cx="231448" cy="231448"/>
+            <a:chOff x="0" y="0"/>
+            <a:chExt cx="1913890" cy="1913890"/>
+          </a:xfrm>
+        </p:grpSpPr>
+        <p:sp>
+          <p:nvSpPr>
+            <p:cNvPr id="42" name="Freeform 15">
+              <a:extLst>
+                <a:ext uri="{FF2B5EF4-FFF2-40B4-BE49-F238E27FC236}">
+                  <a16:creationId xmlns:a16="http://schemas.microsoft.com/office/drawing/2014/main" id="{4D85AC0B-9871-74A0-E8DE-593B3D24755C}"/>
+                </a:ext>
+              </a:extLst>
+            </p:cNvPr>
+            <p:cNvSpPr/>
+            <p:nvPr/>
+          </p:nvSpPr>
+          <p:spPr>
+            <a:xfrm>
+              <a:off x="0" y="0"/>
+              <a:ext cx="1913890" cy="1913890"/>
+            </a:xfrm>
+            <a:custGeom>
+              <a:avLst/>
+              <a:gdLst/>
+              <a:ahLst/>
+              <a:cxnLst/>
+              <a:rect l="l" t="t" r="r" b="b"/>
+              <a:pathLst>
+                <a:path w="1913890" h="1913890">
+                  <a:moveTo>
+                    <a:pt x="0" y="0"/>
+                  </a:moveTo>
+                  <a:lnTo>
+                    <a:pt x="1913890" y="0"/>
+                  </a:lnTo>
+                  <a:lnTo>
+                    <a:pt x="1913890" y="1913890"/>
+                  </a:lnTo>
+                  <a:lnTo>
+                    <a:pt x="0" y="1913890"/>
+                  </a:lnTo>
+                  <a:close/>
+                </a:path>
+              </a:pathLst>
+            </a:custGeom>
+            <a:solidFill>
+              <a:srgbClr val="21A8C9"/>
+            </a:solidFill>
+          </p:spPr>
+          <p:txBody>
+            <a:bodyPr/>
+            <a:lstStyle/>
+            <a:p>
+              <a:endParaRPr lang="en-US"/>
+            </a:p>
+          </p:txBody>
+        </p:sp>
+      </p:grpSp>
+      <p:sp>
+        <p:nvSpPr>
+          <p:cNvPr id="45" name="TextBox 30">
+            <a:extLst>
+              <a:ext uri="{FF2B5EF4-FFF2-40B4-BE49-F238E27FC236}">
+                <a16:creationId xmlns:a16="http://schemas.microsoft.com/office/drawing/2014/main" id="{1C9E22F0-9788-E5C3-06EF-7BD05EE1711C}"/>
+              </a:ext>
+            </a:extLst>
+          </p:cNvPr>
+          <p:cNvSpPr txBox="1"/>
+          <p:nvPr/>
+        </p:nvSpPr>
+        <p:spPr>
+          <a:xfrm>
+            <a:off x="2038881" y="9533239"/>
+            <a:ext cx="820380" cy="109710"/>
+          </a:xfrm>
+          <a:prstGeom prst="rect">
+            <a:avLst/>
+          </a:prstGeom>
+        </p:spPr>
+        <p:txBody>
+          <a:bodyPr lIns="0" tIns="0" rIns="0" bIns="0" rtlCol="0" anchor="t">
+            <a:spAutoFit/>
+          </a:bodyPr>
+          <a:lstStyle/>
+          <a:p>
+            <a:pPr algn="l">
+              <a:lnSpc>
+                <a:spcPts val="938"/>
+              </a:lnSpc>
+            </a:pPr>
+            <a:r>
+              <a:rPr lang="en-US" sz="700" spc="11" dirty="0">
+                <a:solidFill>
+                  <a:srgbClr val="303642"/>
+                </a:solidFill>
+                <a:latin typeface="Open Sans"/>
+                <a:ea typeface="Open Sans"/>
+                <a:cs typeface="Open Sans"/>
+                <a:sym typeface="Open Sans"/>
+              </a:rPr>
+              <a:t>+94 74 257 0943</a:t>
+            </a:r>
+          </a:p>
+        </p:txBody>
+      </p:sp>
+      <p:sp>
+        <p:nvSpPr>
+          <p:cNvPr id="46" name="TextBox 31">
+            <a:extLst>
+              <a:ext uri="{FF2B5EF4-FFF2-40B4-BE49-F238E27FC236}">
+                <a16:creationId xmlns:a16="http://schemas.microsoft.com/office/drawing/2014/main" id="{A7930A79-EE27-A822-B264-4125E0445915}"/>
+              </a:ext>
+            </a:extLst>
+          </p:cNvPr>
+          <p:cNvSpPr txBox="1"/>
+          <p:nvPr/>
+        </p:nvSpPr>
+        <p:spPr>
+          <a:xfrm>
+            <a:off x="4956851" y="9461500"/>
+            <a:ext cx="1196973" cy="266235"/>
+          </a:xfrm>
+          <a:prstGeom prst="rect">
+            <a:avLst/>
+          </a:prstGeom>
+        </p:spPr>
+        <p:txBody>
+          <a:bodyPr lIns="0" tIns="0" rIns="0" bIns="0" rtlCol="0" anchor="t">
+            <a:spAutoFit/>
+          </a:bodyPr>
+          <a:lstStyle/>
+          <a:p>
+            <a:pPr algn="l">
+              <a:lnSpc>
+                <a:spcPts val="1072"/>
+              </a:lnSpc>
+            </a:pPr>
+            <a:r>
+              <a:rPr lang="en-US" sz="800" spc="12">
+                <a:solidFill>
+                  <a:srgbClr val="303642"/>
+                </a:solidFill>
+                <a:latin typeface="Open Sans"/>
+                <a:ea typeface="Open Sans"/>
+                <a:cs typeface="Open Sans"/>
+                <a:sym typeface="Open Sans"/>
+              </a:rPr>
+              <a:t>Dewalegma, Dellawa, Morawaka</a:t>
+            </a:r>
+          </a:p>
+        </p:txBody>
+      </p:sp>
+      <p:sp>
+        <p:nvSpPr>
+          <p:cNvPr id="49" name="TextBox 32">
+            <a:extLst>
+              <a:ext uri="{FF2B5EF4-FFF2-40B4-BE49-F238E27FC236}">
+                <a16:creationId xmlns:a16="http://schemas.microsoft.com/office/drawing/2014/main" id="{4053F647-E7DD-A9CB-B088-7CF536EFE441}"/>
+              </a:ext>
+            </a:extLst>
+          </p:cNvPr>
+          <p:cNvSpPr txBox="1"/>
+          <p:nvPr/>
+        </p:nvSpPr>
+        <p:spPr>
+          <a:xfrm>
+            <a:off x="3388477" y="9520004"/>
+            <a:ext cx="1304173" cy="130768"/>
+          </a:xfrm>
+          <a:prstGeom prst="rect">
+            <a:avLst/>
+          </a:prstGeom>
+        </p:spPr>
+        <p:txBody>
+          <a:bodyPr lIns="0" tIns="0" rIns="0" bIns="0" rtlCol="0" anchor="t">
+            <a:spAutoFit/>
+          </a:bodyPr>
+          <a:lstStyle/>
+          <a:p>
+            <a:pPr algn="l">
+              <a:lnSpc>
+                <a:spcPts val="1072"/>
+              </a:lnSpc>
+            </a:pPr>
+            <a:r>
+              <a:rPr lang="en-US" sz="800" spc="12">
+                <a:solidFill>
+                  <a:srgbClr val="303642"/>
+                </a:solidFill>
+                <a:latin typeface="Open Sans"/>
+                <a:ea typeface="Open Sans"/>
+                <a:cs typeface="Open Sans"/>
+                <a:sym typeface="Open Sans"/>
+              </a:rPr>
+              <a:t>www.itechlk.com</a:t>
+            </a:r>
+          </a:p>
+        </p:txBody>
+      </p:sp>
+      <p:pic>
+        <p:nvPicPr>
+          <p:cNvPr id="50" name="Picture 49">
+            <a:extLst>
+              <a:ext uri="{FF2B5EF4-FFF2-40B4-BE49-F238E27FC236}">
+                <a16:creationId xmlns:a16="http://schemas.microsoft.com/office/drawing/2014/main" id="{32242A98-FB99-AE71-57F9-DE7CD9ACB46F}"/>
+              </a:ext>
+            </a:extLst>
+          </p:cNvPr>
+          <p:cNvPicPr>
+            <a:picLocks noChangeAspect="1"/>
+          </p:cNvPicPr>
+          <p:nvPr/>
+        </p:nvPicPr>
+        <p:blipFill>
+          <a:blip r:embed="rId7" cstate="print">
+            <a:extLst>
+              <a:ext uri="{28A0092B-C50C-407E-A947-70E740481C1C}">
+                <a14:useLocalDpi xmlns:a14="http://schemas.microsoft.com/office/drawing/2010/main" val="0"/>
+              </a:ext>
+            </a:extLst>
+          </a:blip>
+          <a:srcRect/>
+          <a:stretch/>
+        </p:blipFill>
+        <p:spPr>
+          <a:xfrm flipH="1">
+            <a:off x="1824349" y="9549926"/>
+            <a:ext cx="100846" cy="100846"/>
+          </a:xfrm>
+          <a:prstGeom prst="rect">
+            <a:avLst/>
+          </a:prstGeom>
+        </p:spPr>
+      </p:pic>
+      <p:pic>
+        <p:nvPicPr>
+          <p:cNvPr id="51" name="Picture 50">
+            <a:extLst>
+              <a:ext uri="{FF2B5EF4-FFF2-40B4-BE49-F238E27FC236}">
+                <a16:creationId xmlns:a16="http://schemas.microsoft.com/office/drawing/2014/main" id="{5A591B02-EFFA-FF04-4A60-A5E9C5FE355C}"/>
+              </a:ext>
+            </a:extLst>
+          </p:cNvPr>
+          <p:cNvPicPr>
+            <a:picLocks noChangeAspect="1"/>
+          </p:cNvPicPr>
+          <p:nvPr/>
+        </p:nvPicPr>
+        <p:blipFill>
+          <a:blip r:embed="rId8" cstate="print">
+            <a:extLst>
+              <a:ext uri="{28A0092B-C50C-407E-A947-70E740481C1C}">
+                <a14:useLocalDpi xmlns:a14="http://schemas.microsoft.com/office/drawing/2010/main" val="0"/>
+              </a:ext>
+            </a:extLst>
+          </a:blip>
+          <a:srcRect/>
+          <a:stretch/>
+        </p:blipFill>
+        <p:spPr>
+          <a:xfrm flipH="1">
+            <a:off x="3154335" y="9549926"/>
+            <a:ext cx="100846" cy="100846"/>
+          </a:xfrm>
+          <a:prstGeom prst="rect">
+            <a:avLst/>
+          </a:prstGeom>
+        </p:spPr>
+      </p:pic>
+      <p:pic>
+        <p:nvPicPr>
+          <p:cNvPr id="52" name="Picture 51">
+            <a:extLst>
+              <a:ext uri="{FF2B5EF4-FFF2-40B4-BE49-F238E27FC236}">
+                <a16:creationId xmlns:a16="http://schemas.microsoft.com/office/drawing/2014/main" id="{2E994B4F-D791-A3A6-F8B3-B6F1F3E0B2F7}"/>
+              </a:ext>
+            </a:extLst>
+          </p:cNvPr>
+          <p:cNvPicPr>
+            <a:picLocks noChangeAspect="1"/>
+          </p:cNvPicPr>
+          <p:nvPr/>
+        </p:nvPicPr>
+        <p:blipFill>
+          <a:blip r:embed="rId9" cstate="print">
+            <a:extLst>
+              <a:ext uri="{28A0092B-C50C-407E-A947-70E740481C1C}">
+                <a14:useLocalDpi xmlns:a14="http://schemas.microsoft.com/office/drawing/2010/main" val="0"/>
+              </a:ext>
+            </a:extLst>
+          </a:blip>
+          <a:srcRect/>
+          <a:stretch/>
+        </p:blipFill>
+        <p:spPr>
+          <a:xfrm flipH="1">
+            <a:off x="4717881" y="9544698"/>
+            <a:ext cx="100846" cy="100846"/>
+          </a:xfrm>
+          <a:prstGeom prst="rect">
+            <a:avLst/>
+          </a:prstGeom>
+        </p:spPr>
+      </p:pic>
     </p:spTree>
   </p:cSld>
   <p:clrMapOvr>
